--- a/Dia-7/Carrusel Donacion - IG 1080x1350.pptx
+++ b/Dia-7/Carrusel Donacion - IG 1080x1350.pptx
@@ -3088,7 +3088,7 @@
     <p:bg>
       <p:bgPr>
         <a:solidFill>
-          <a:srgbClr val="F5C13F"/>
+          <a:srgbClr val="14181F"/>
         </a:solidFill>
         <a:effectLst/>
       </p:bgPr>
@@ -3100,24 +3100,48 @@
         <p:nvPr/>
       </p:nvGrpSpPr>
       <p:grpSpPr/>
-      <p:sp>
-        <p:nvSpPr>
-          <p:cNvPr id="2" name="Oval 1"/>
+      <p:pic>
+        <p:nvPicPr>
+          <p:cNvPr id="2" name="Picture 1" descr="A_45_duo.png"/>
+          <p:cNvPicPr>
+            <a:picLocks noChangeAspect="1"/>
+          </p:cNvPicPr>
+          <p:nvPr/>
+        </p:nvPicPr>
+        <p:blipFill>
+          <a:blip r:embed="rId2"/>
+          <a:stretch>
+            <a:fillRect/>
+          </a:stretch>
+        </p:blipFill>
+        <p:spPr>
+          <a:xfrm>
+            <a:off x="-28575" y="0"/>
+            <a:ext cx="8286750" cy="10287000"/>
+          </a:xfrm>
+          <a:prstGeom prst="rect">
+            <a:avLst/>
+          </a:prstGeom>
+        </p:spPr>
+      </p:pic>
+      <p:sp>
+        <p:nvSpPr>
+          <p:cNvPr id="3" name="Rounded Rectangle 2"/>
           <p:cNvSpPr/>
           <p:nvPr/>
         </p:nvSpPr>
         <p:spPr>
           <a:xfrm>
-            <a:off x="4518051" y="4931572"/>
-            <a:ext cx="6748272" cy="8637788"/>
-          </a:xfrm>
-          <a:prstGeom prst="ellipse">
-            <a:avLst/>
+            <a:off x="777240" y="777240"/>
+            <a:ext cx="2647188" cy="373380"/>
+          </a:xfrm>
+          <a:prstGeom prst="roundRect">
+            <a:avLst>
+              <a:gd name="adj" fmla="val 50000"/>
+            </a:avLst>
           </a:prstGeom>
           <a:solidFill>
-            <a:srgbClr val="14181F">
-              <a:alpha val="16000"/>
-            </a:srgbClr>
+            <a:srgbClr val="F5C13F"/>
           </a:solidFill>
           <a:ln>
             <a:noFill/>
@@ -3139,23 +3163,32 @@
           </a:fontRef>
         </p:style>
         <p:txBody>
-          <a:bodyPr rtlCol="0" anchor="ctr"/>
+          <a:bodyPr rtlCol="0" anchor="ctr" wrap="none" lIns="128016" rIns="128016" tIns="18288" bIns="18288"/>
           <a:lstStyle/>
           <a:p>
             <a:pPr algn="ctr"/>
-          </a:p>
-        </p:txBody>
-      </p:sp>
-      <p:sp>
-        <p:nvSpPr>
-          <p:cNvPr id="3" name="TextBox 2"/>
+            <a:r>
+              <a:rPr sz="1500" b="1">
+                <a:solidFill>
+                  <a:srgbClr val="14181F"/>
+                </a:solidFill>
+                <a:latin typeface="Bricolage Grotesque"/>
+              </a:rPr>
+              <a:t>PROGRAMA SOLIDARIO</a:t>
+            </a:r>
+          </a:p>
+        </p:txBody>
+      </p:sp>
+      <p:sp>
+        <p:nvSpPr>
+          <p:cNvPr id="4" name="TextBox 3"/>
           <p:cNvSpPr txBox="1"/>
           <p:nvPr/>
         </p:nvSpPr>
         <p:spPr>
           <a:xfrm>
-            <a:off x="777240" y="777240"/>
-            <a:ext cx="6675120" cy="457200"/>
+            <a:off x="777240" y="1435608"/>
+            <a:ext cx="6675120" cy="1753108"/>
           </a:xfrm>
           <a:prstGeom prst="rect">
             <a:avLst/>
@@ -3174,71 +3207,66 @@
               </a:lnSpc>
             </a:pPr>
             <a:r>
-              <a:rPr sz="1800" b="1">
+              <a:rPr sz="4600" b="1">
                 <a:solidFill>
-                  <a:srgbClr val="14181F"/>
+                  <a:srgbClr val="FFFFFF"/>
+                </a:solidFill>
+                <a:latin typeface="Bricolage Grotesque"/>
+              </a:rPr>
+              <a:t>Tu compra ayuda ❤️</a:t>
+            </a:r>
+          </a:p>
+        </p:txBody>
+      </p:sp>
+      <p:sp>
+        <p:nvSpPr>
+          <p:cNvPr id="5" name="TextBox 4"/>
+          <p:cNvSpPr txBox="1"/>
+          <p:nvPr/>
+        </p:nvSpPr>
+        <p:spPr>
+          <a:xfrm>
+            <a:off x="777240" y="3188716"/>
+            <a:ext cx="6675120" cy="835660"/>
+          </a:xfrm>
+          <a:prstGeom prst="rect">
+            <a:avLst/>
+          </a:prstGeom>
+          <a:noFill/>
+        </p:spPr>
+        <p:txBody>
+          <a:bodyPr wrap="square" anchor="t" lIns="0" rIns="0" tIns="0" bIns="0">
+            <a:spAutoFit/>
+          </a:bodyPr>
+          <a:lstStyle/>
+          <a:p>
+            <a:pPr algn="l">
+              <a:lnSpc>
+                <a:spcPct val="110000"/>
+              </a:lnSpc>
+            </a:pPr>
+            <a:r>
+              <a:rPr sz="2200" b="0">
+                <a:solidFill>
+                  <a:srgbClr val="FFFFFF"/>
                 </a:solidFill>
                 <a:latin typeface="Hanken Grotesk"/>
               </a:rPr>
-              <a:t>PROGRAMA SOLIDARIO</a:t>
-            </a:r>
-          </a:p>
-        </p:txBody>
-      </p:sp>
-      <p:sp>
-        <p:nvSpPr>
-          <p:cNvPr id="4" name="Rectangle 3"/>
-          <p:cNvSpPr/>
-          <p:nvPr/>
-        </p:nvSpPr>
-        <p:spPr>
-          <a:xfrm>
-            <a:off x="777240" y="2126361"/>
-            <a:ext cx="1371600" cy="146304"/>
-          </a:xfrm>
-          <a:prstGeom prst="rect">
-            <a:avLst/>
-          </a:prstGeom>
-          <a:solidFill>
-            <a:srgbClr val="14181F"/>
-          </a:solidFill>
-          <a:ln>
-            <a:noFill/>
-          </a:ln>
-          <a:effectLst/>
-        </p:spPr>
-        <p:style>
-          <a:lnRef idx="1">
-            <a:schemeClr val="accent1"/>
-          </a:lnRef>
-          <a:fillRef idx="3">
-            <a:schemeClr val="accent1"/>
-          </a:fillRef>
-          <a:effectRef idx="2">
-            <a:schemeClr val="accent1"/>
-          </a:effectRef>
-          <a:fontRef idx="minor">
-            <a:schemeClr val="lt1"/>
-          </a:fontRef>
-        </p:style>
-        <p:txBody>
-          <a:bodyPr rtlCol="0" anchor="ctr"/>
-          <a:lstStyle/>
-          <a:p>
-            <a:pPr algn="ctr"/>
-          </a:p>
-        </p:txBody>
-      </p:sp>
-      <p:sp>
-        <p:nvSpPr>
-          <p:cNvPr id="5" name="TextBox 4"/>
+              <a:t>Así funciona la donación de Huevera.</a:t>
+            </a:r>
+          </a:p>
+        </p:txBody>
+      </p:sp>
+      <p:sp>
+        <p:nvSpPr>
+          <p:cNvPr id="6" name="TextBox 5"/>
           <p:cNvSpPr txBox="1"/>
           <p:nvPr/>
         </p:nvSpPr>
         <p:spPr>
           <a:xfrm>
-            <a:off x="777240" y="2583561"/>
-            <a:ext cx="6675120" cy="4388358"/>
+            <a:off x="777240" y="9326880"/>
+            <a:ext cx="6675120" cy="548640"/>
           </a:xfrm>
           <a:prstGeom prst="rect">
             <a:avLst/>
@@ -3257,87 +3285,9 @@
               </a:lnSpc>
             </a:pPr>
             <a:r>
-              <a:rPr sz="8600" b="1">
-                <a:solidFill>
-                  <a:srgbClr val="14181F"/>
-                </a:solidFill>
-                <a:latin typeface="Bricolage Grotesque"/>
-              </a:rPr>
-              <a:t>Tu compra ayuda ❤️</a:t>
-            </a:r>
-          </a:p>
-        </p:txBody>
-      </p:sp>
-      <p:sp>
-        <p:nvSpPr>
-          <p:cNvPr id="6" name="TextBox 5"/>
-          <p:cNvSpPr txBox="1"/>
-          <p:nvPr/>
-        </p:nvSpPr>
-        <p:spPr>
-          <a:xfrm>
-            <a:off x="777240" y="6971919"/>
-            <a:ext cx="6675120" cy="1530858"/>
-          </a:xfrm>
-          <a:prstGeom prst="rect">
-            <a:avLst/>
-          </a:prstGeom>
-          <a:noFill/>
-        </p:spPr>
-        <p:txBody>
-          <a:bodyPr wrap="square" anchor="t" lIns="0" rIns="0" tIns="0" bIns="0">
-            <a:spAutoFit/>
-          </a:bodyPr>
-          <a:lstStyle/>
-          <a:p>
-            <a:pPr algn="l">
-              <a:lnSpc>
-                <a:spcPct val="110000"/>
-              </a:lnSpc>
-            </a:pPr>
-            <a:r>
-              <a:rPr sz="2600" b="0">
-                <a:solidFill>
-                  <a:srgbClr val="14181F"/>
-                </a:solidFill>
-                <a:latin typeface="Hanken Grotesk"/>
-              </a:rPr>
-              <a:t>Así funciona la donación de Huevera.</a:t>
-            </a:r>
-          </a:p>
-        </p:txBody>
-      </p:sp>
-      <p:sp>
-        <p:nvSpPr>
-          <p:cNvPr id="7" name="TextBox 6"/>
-          <p:cNvSpPr txBox="1"/>
-          <p:nvPr/>
-        </p:nvSpPr>
-        <p:spPr>
-          <a:xfrm>
-            <a:off x="777240" y="9326880"/>
-            <a:ext cx="6675120" cy="548640"/>
-          </a:xfrm>
-          <a:prstGeom prst="rect">
-            <a:avLst/>
-          </a:prstGeom>
-          <a:noFill/>
-        </p:spPr>
-        <p:txBody>
-          <a:bodyPr wrap="square" anchor="t" lIns="0" rIns="0" tIns="0" bIns="0">
-            <a:spAutoFit/>
-          </a:bodyPr>
-          <a:lstStyle/>
-          <a:p>
-            <a:pPr algn="l">
-              <a:lnSpc>
-                <a:spcPct val="100000"/>
-              </a:lnSpc>
-            </a:pPr>
-            <a:r>
               <a:rPr sz="1800" b="1">
                 <a:solidFill>
-                  <a:srgbClr val="14181F"/>
+                  <a:srgbClr val="F5C13F"/>
                 </a:solidFill>
                 <a:latin typeface="Bricolage Grotesque"/>
               </a:rPr>
@@ -3346,7 +3296,7 @@
             <a:r>
               <a:rPr sz="1800" b="1">
                 <a:solidFill>
-                  <a:srgbClr val="14181F"/>
+                  <a:srgbClr val="FFFFFF"/>
                 </a:solidFill>
                 <a:latin typeface="Bricolage Grotesque"/>
               </a:rPr>
@@ -3357,7 +3307,7 @@
       </p:sp>
       <p:sp>
         <p:nvSpPr>
-          <p:cNvPr id="8" name="TextBox 7"/>
+          <p:cNvPr id="7" name="TextBox 6"/>
           <p:cNvSpPr txBox="1"/>
           <p:nvPr/>
         </p:nvSpPr>
@@ -3385,7 +3335,7 @@
             <a:r>
               <a:rPr sz="2000" b="1">
                 <a:solidFill>
-                  <a:srgbClr val="14181F"/>
+                  <a:srgbClr val="FFFFFF"/>
                 </a:solidFill>
                 <a:latin typeface="Bricolage Grotesque"/>
               </a:rPr>
@@ -3422,14 +3372,113 @@
       <p:grpSpPr/>
       <p:sp>
         <p:nvSpPr>
-          <p:cNvPr id="2" name="TextBox 1"/>
+          <p:cNvPr id="2" name="Rounded Rectangle 1"/>
+          <p:cNvSpPr/>
+          <p:nvPr/>
+        </p:nvSpPr>
+        <p:spPr>
+          <a:xfrm>
+            <a:off x="777240" y="777240"/>
+            <a:ext cx="2018538" cy="373380"/>
+          </a:xfrm>
+          <a:prstGeom prst="roundRect">
+            <a:avLst>
+              <a:gd name="adj" fmla="val 50000"/>
+            </a:avLst>
+          </a:prstGeom>
+          <a:solidFill>
+            <a:srgbClr val="F5C13F"/>
+          </a:solidFill>
+          <a:ln>
+            <a:noFill/>
+          </a:ln>
+          <a:effectLst/>
+        </p:spPr>
+        <p:style>
+          <a:lnRef idx="1">
+            <a:schemeClr val="accent1"/>
+          </a:lnRef>
+          <a:fillRef idx="3">
+            <a:schemeClr val="accent1"/>
+          </a:fillRef>
+          <a:effectRef idx="2">
+            <a:schemeClr val="accent1"/>
+          </a:effectRef>
+          <a:fontRef idx="minor">
+            <a:schemeClr val="lt1"/>
+          </a:fontRef>
+        </p:style>
+        <p:txBody>
+          <a:bodyPr rtlCol="0" anchor="ctr" wrap="none" lIns="128016" rIns="128016" tIns="18288" bIns="18288"/>
+          <a:lstStyle/>
+          <a:p>
+            <a:pPr algn="ctr"/>
+            <a:r>
+              <a:rPr sz="1500" b="1">
+                <a:solidFill>
+                  <a:srgbClr val="14181F"/>
+                </a:solidFill>
+                <a:latin typeface="Bricolage Grotesque"/>
+              </a:rPr>
+              <a:t>CÓMO FUNCIONA</a:t>
+            </a:r>
+          </a:p>
+        </p:txBody>
+      </p:sp>
+      <p:sp>
+        <p:nvSpPr>
+          <p:cNvPr id="3" name="Rectangle 2"/>
+          <p:cNvSpPr/>
+          <p:nvPr/>
+        </p:nvSpPr>
+        <p:spPr>
+          <a:xfrm>
+            <a:off x="777240" y="2713736"/>
+            <a:ext cx="1371600" cy="146304"/>
+          </a:xfrm>
+          <a:prstGeom prst="rect">
+            <a:avLst/>
+          </a:prstGeom>
+          <a:solidFill>
+            <a:srgbClr val="F5C13F"/>
+          </a:solidFill>
+          <a:ln>
+            <a:noFill/>
+          </a:ln>
+          <a:effectLst/>
+        </p:spPr>
+        <p:style>
+          <a:lnRef idx="1">
+            <a:schemeClr val="accent1"/>
+          </a:lnRef>
+          <a:fillRef idx="3">
+            <a:schemeClr val="accent1"/>
+          </a:fillRef>
+          <a:effectRef idx="2">
+            <a:schemeClr val="accent1"/>
+          </a:effectRef>
+          <a:fontRef idx="minor">
+            <a:schemeClr val="lt1"/>
+          </a:fontRef>
+        </p:style>
+        <p:txBody>
+          <a:bodyPr rtlCol="0" anchor="ctr"/>
+          <a:lstStyle/>
+          <a:p>
+            <a:pPr algn="ctr"/>
+          </a:p>
+        </p:txBody>
+      </p:sp>
+      <p:sp>
+        <p:nvSpPr>
+          <p:cNvPr id="4" name="TextBox 3"/>
           <p:cNvSpPr txBox="1"/>
           <p:nvPr/>
         </p:nvSpPr>
         <p:spPr>
           <a:xfrm>
-            <a:off x="777240" y="2533142"/>
-            <a:ext cx="6675120" cy="4102608"/>
+            <a:off x="777240" y="3170936"/>
+            <a:ext cx="6675120" cy="3213608"/>
           </a:xfrm>
           <a:prstGeom prst="rect">
             <a:avLst/>
@@ -3442,32 +3491,32 @@
           </a:bodyPr>
           <a:lstStyle/>
           <a:p>
-            <a:pPr algn="ctr">
+            <a:pPr algn="l">
               <a:lnSpc>
                 <a:spcPct val="100000"/>
               </a:lnSpc>
             </a:pPr>
             <a:r>
-              <a:rPr sz="4800" b="1">
+              <a:rPr sz="4600" b="1">
                 <a:solidFill>
                   <a:srgbClr val="FFFFFF"/>
                 </a:solidFill>
                 <a:latin typeface="Bricolage Grotesque"/>
               </a:rPr>
-              <a:t>Al hacer tu pedido puedes sumar una donación voluntaria.</a:t>
-            </a:r>
-          </a:p>
-        </p:txBody>
-      </p:sp>
-      <p:sp>
-        <p:nvSpPr>
-          <p:cNvPr id="3" name="TextBox 2"/>
+              <a:t>Suma una donación voluntaria a tu pedido.</a:t>
+            </a:r>
+          </a:p>
+        </p:txBody>
+      </p:sp>
+      <p:sp>
+        <p:nvSpPr>
+          <p:cNvPr id="5" name="TextBox 4"/>
           <p:cNvSpPr txBox="1"/>
           <p:nvPr/>
         </p:nvSpPr>
         <p:spPr>
           <a:xfrm>
-            <a:off x="777240" y="6635750"/>
+            <a:off x="777240" y="6384544"/>
             <a:ext cx="6675120" cy="1118108"/>
           </a:xfrm>
           <a:prstGeom prst="rect">
@@ -3481,7 +3530,7 @@
           </a:bodyPr>
           <a:lstStyle/>
           <a:p>
-            <a:pPr algn="ctr">
+            <a:pPr algn="l">
               <a:lnSpc>
                 <a:spcPct val="110000"/>
               </a:lnSpc>
@@ -3507,6 +3556,248 @@
 </file>
 
 <file path=ppt/slides/slide3.xml><?xml version="1.0" encoding="utf-8"?>
+<p:sld xmlns:a="http://schemas.openxmlformats.org/drawingml/2006/main" xmlns:p="http://schemas.openxmlformats.org/presentationml/2006/main" xmlns:r="http://schemas.openxmlformats.org/officeDocument/2006/relationships">
+  <p:cSld>
+    <p:bg>
+      <p:bgPr>
+        <a:solidFill>
+          <a:srgbClr val="FFFFFF"/>
+        </a:solidFill>
+        <a:effectLst/>
+      </p:bgPr>
+    </p:bg>
+    <p:spTree>
+      <p:nvGrpSpPr>
+        <p:cNvPr id="1" name=""/>
+        <p:cNvGrpSpPr/>
+        <p:nvPr/>
+      </p:nvGrpSpPr>
+      <p:grpSpPr/>
+      <p:sp>
+        <p:nvSpPr>
+          <p:cNvPr id="2" name="Rounded Rectangle 1"/>
+          <p:cNvSpPr/>
+          <p:nvPr/>
+        </p:nvSpPr>
+        <p:spPr>
+          <a:xfrm>
+            <a:off x="777240" y="1188720"/>
+            <a:ext cx="1012698" cy="373380"/>
+          </a:xfrm>
+          <a:prstGeom prst="roundRect">
+            <a:avLst>
+              <a:gd name="adj" fmla="val 50000"/>
+            </a:avLst>
+          </a:prstGeom>
+          <a:solidFill>
+            <a:srgbClr val="F5C13F"/>
+          </a:solidFill>
+          <a:ln>
+            <a:noFill/>
+          </a:ln>
+          <a:effectLst/>
+        </p:spPr>
+        <p:style>
+          <a:lnRef idx="1">
+            <a:schemeClr val="accent1"/>
+          </a:lnRef>
+          <a:fillRef idx="3">
+            <a:schemeClr val="accent1"/>
+          </a:fillRef>
+          <a:effectRef idx="2">
+            <a:schemeClr val="accent1"/>
+          </a:effectRef>
+          <a:fontRef idx="minor">
+            <a:schemeClr val="lt1"/>
+          </a:fontRef>
+        </p:style>
+        <p:txBody>
+          <a:bodyPr rtlCol="0" anchor="ctr" wrap="none" lIns="128016" rIns="128016" tIns="18288" bIns="18288"/>
+          <a:lstStyle/>
+          <a:p>
+            <a:pPr algn="ctr"/>
+            <a:r>
+              <a:rPr sz="1500" b="1">
+                <a:solidFill>
+                  <a:srgbClr val="14181F"/>
+                </a:solidFill>
+                <a:latin typeface="Bricolage Grotesque"/>
+              </a:rPr>
+              <a:t>DESDE</a:t>
+            </a:r>
+          </a:p>
+        </p:txBody>
+      </p:sp>
+      <p:sp>
+        <p:nvSpPr>
+          <p:cNvPr id="3" name="TextBox 2"/>
+          <p:cNvSpPr txBox="1"/>
+          <p:nvPr/>
+        </p:nvSpPr>
+        <p:spPr>
+          <a:xfrm>
+            <a:off x="777240" y="1847088"/>
+            <a:ext cx="6675120" cy="1584960"/>
+          </a:xfrm>
+          <a:prstGeom prst="rect">
+            <a:avLst/>
+          </a:prstGeom>
+          <a:noFill/>
+        </p:spPr>
+        <p:txBody>
+          <a:bodyPr wrap="square" anchor="t" lIns="0" rIns="0" tIns="0" bIns="0">
+            <a:spAutoFit/>
+          </a:bodyPr>
+          <a:lstStyle/>
+          <a:p>
+            <a:pPr algn="l">
+              <a:lnSpc>
+                <a:spcPct val="90000"/>
+              </a:lnSpc>
+            </a:pPr>
+            <a:r>
+              <a:rPr sz="12000" b="1">
+                <a:solidFill>
+                  <a:srgbClr val="F5C13F"/>
+                </a:solidFill>
+                <a:latin typeface="Bricolage Grotesque"/>
+              </a:rPr>
+              <a:t>$500</a:t>
+            </a:r>
+          </a:p>
+        </p:txBody>
+      </p:sp>
+      <p:sp>
+        <p:nvSpPr>
+          <p:cNvPr id="4" name="Rectangle 3"/>
+          <p:cNvSpPr/>
+          <p:nvPr/>
+        </p:nvSpPr>
+        <p:spPr>
+          <a:xfrm>
+            <a:off x="777240" y="3541776"/>
+            <a:ext cx="1554480" cy="146304"/>
+          </a:xfrm>
+          <a:prstGeom prst="rect">
+            <a:avLst/>
+          </a:prstGeom>
+          <a:solidFill>
+            <a:srgbClr val="F5C13F"/>
+          </a:solidFill>
+          <a:ln>
+            <a:noFill/>
+          </a:ln>
+          <a:effectLst/>
+        </p:spPr>
+        <p:style>
+          <a:lnRef idx="1">
+            <a:schemeClr val="accent1"/>
+          </a:lnRef>
+          <a:fillRef idx="3">
+            <a:schemeClr val="accent1"/>
+          </a:fillRef>
+          <a:effectRef idx="2">
+            <a:schemeClr val="accent1"/>
+          </a:effectRef>
+          <a:fontRef idx="minor">
+            <a:schemeClr val="lt1"/>
+          </a:fontRef>
+        </p:style>
+        <p:txBody>
+          <a:bodyPr rtlCol="0" anchor="ctr"/>
+          <a:lstStyle/>
+          <a:p>
+            <a:pPr algn="ctr"/>
+          </a:p>
+        </p:txBody>
+      </p:sp>
+      <p:sp>
+        <p:nvSpPr>
+          <p:cNvPr id="5" name="TextBox 4"/>
+          <p:cNvSpPr txBox="1"/>
+          <p:nvPr/>
+        </p:nvSpPr>
+        <p:spPr>
+          <a:xfrm>
+            <a:off x="777240" y="3998976"/>
+            <a:ext cx="6675120" cy="2292858"/>
+          </a:xfrm>
+          <a:prstGeom prst="rect">
+            <a:avLst/>
+          </a:prstGeom>
+          <a:noFill/>
+        </p:spPr>
+        <p:txBody>
+          <a:bodyPr wrap="square" anchor="t" lIns="0" rIns="0" tIns="0" bIns="0">
+            <a:spAutoFit/>
+          </a:bodyPr>
+          <a:lstStyle/>
+          <a:p>
+            <a:pPr algn="l">
+              <a:lnSpc>
+                <a:spcPct val="100000"/>
+              </a:lnSpc>
+            </a:pPr>
+            <a:r>
+              <a:rPr sz="4200" b="1">
+                <a:solidFill>
+                  <a:srgbClr val="14181F"/>
+                </a:solidFill>
+                <a:latin typeface="Bricolage Grotesque"/>
+              </a:rPr>
+              <a:t>Aporta desde $500, o lo que quieras.</a:t>
+            </a:r>
+          </a:p>
+        </p:txBody>
+      </p:sp>
+      <p:sp>
+        <p:nvSpPr>
+          <p:cNvPr id="6" name="TextBox 5"/>
+          <p:cNvSpPr txBox="1"/>
+          <p:nvPr/>
+        </p:nvSpPr>
+        <p:spPr>
+          <a:xfrm>
+            <a:off x="777240" y="6291834"/>
+            <a:ext cx="6675120" cy="1280160"/>
+          </a:xfrm>
+          <a:prstGeom prst="rect">
+            <a:avLst/>
+          </a:prstGeom>
+          <a:noFill/>
+        </p:spPr>
+        <p:txBody>
+          <a:bodyPr wrap="square" anchor="t" lIns="0" rIns="0" tIns="0" bIns="0">
+            <a:spAutoFit/>
+          </a:bodyPr>
+          <a:lstStyle/>
+          <a:p>
+            <a:pPr algn="l">
+              <a:lnSpc>
+                <a:spcPct val="110000"/>
+              </a:lnSpc>
+            </a:pPr>
+            <a:r>
+              <a:rPr sz="2400" b="0">
+                <a:solidFill>
+                  <a:srgbClr val="14181F"/>
+                </a:solidFill>
+                <a:latin typeface="Hanken Grotesk"/>
+              </a:rPr>
+              <a:t>También puedes donar de forma anónima.</a:t>
+            </a:r>
+          </a:p>
+        </p:txBody>
+      </p:sp>
+    </p:spTree>
+  </p:cSld>
+  <p:clrMapOvr>
+    <a:masterClrMapping/>
+  </p:clrMapOvr>
+</p:sld>
+</file>
+
+<file path=ppt/slides/slide4.xml><?xml version="1.0" encoding="utf-8"?>
 <p:sld xmlns:a="http://schemas.openxmlformats.org/drawingml/2006/main" xmlns:p="http://schemas.openxmlformats.org/presentationml/2006/main" xmlns:r="http://schemas.openxmlformats.org/officeDocument/2006/relationships">
   <p:cSld>
     <p:bg>
@@ -3526,22 +3817,22 @@
       <p:grpSpPr/>
       <p:sp>
         <p:nvSpPr>
-          <p:cNvPr id="2" name="Oval 1"/>
+          <p:cNvPr id="2" name="Rounded Rectangle 1"/>
           <p:cNvSpPr/>
           <p:nvPr/>
         </p:nvSpPr>
         <p:spPr>
           <a:xfrm>
-            <a:off x="4518051" y="4931572"/>
-            <a:ext cx="6748272" cy="8637788"/>
-          </a:xfrm>
-          <a:prstGeom prst="ellipse">
-            <a:avLst/>
+            <a:off x="777240" y="777240"/>
+            <a:ext cx="1641348" cy="373380"/>
+          </a:xfrm>
+          <a:prstGeom prst="roundRect">
+            <a:avLst>
+              <a:gd name="adj" fmla="val 50000"/>
+            </a:avLst>
           </a:prstGeom>
           <a:solidFill>
-            <a:srgbClr val="F5C13F">
-              <a:alpha val="12000"/>
-            </a:srgbClr>
+            <a:srgbClr val="F5C13F"/>
           </a:solidFill>
           <a:ln>
             <a:noFill/>
@@ -3563,25 +3854,34 @@
           </a:fontRef>
         </p:style>
         <p:txBody>
-          <a:bodyPr rtlCol="0" anchor="ctr"/>
+          <a:bodyPr rtlCol="0" anchor="ctr" wrap="none" lIns="128016" rIns="128016" tIns="18288" bIns="18288"/>
           <a:lstStyle/>
           <a:p>
             <a:pPr algn="ctr"/>
-          </a:p>
-        </p:txBody>
-      </p:sp>
-      <p:sp>
-        <p:nvSpPr>
-          <p:cNvPr id="3" name="Oval 2"/>
+            <a:r>
+              <a:rPr sz="1500" b="1">
+                <a:solidFill>
+                  <a:srgbClr val="14181F"/>
+                </a:solidFill>
+                <a:latin typeface="Bricolage Grotesque"/>
+              </a:rPr>
+              <a:t>EL IMPACTO</a:t>
+            </a:r>
+          </a:p>
+        </p:txBody>
+      </p:sp>
+      <p:sp>
+        <p:nvSpPr>
+          <p:cNvPr id="3" name="Rectangle 2"/>
           <p:cNvSpPr/>
           <p:nvPr/>
         </p:nvSpPr>
         <p:spPr>
           <a:xfrm>
-            <a:off x="777240" y="1280160"/>
-            <a:ext cx="3200400" cy="3200400"/>
-          </a:xfrm>
-          <a:prstGeom prst="ellipse">
+            <a:off x="777240" y="2586736"/>
+            <a:ext cx="1371600" cy="146304"/>
+          </a:xfrm>
+          <a:prstGeom prst="rect">
             <a:avLst/>
           </a:prstGeom>
           <a:solidFill>
@@ -3622,47 +3922,8 @@
         </p:nvSpPr>
         <p:spPr>
           <a:xfrm>
-            <a:off x="777240" y="1280160"/>
-            <a:ext cx="3200400" cy="3200400"/>
-          </a:xfrm>
-          <a:prstGeom prst="rect">
-            <a:avLst/>
-          </a:prstGeom>
-          <a:noFill/>
-        </p:spPr>
-        <p:txBody>
-          <a:bodyPr wrap="square" anchor="ctr" lIns="0" rIns="0" tIns="0" bIns="0">
-            <a:spAutoFit/>
-          </a:bodyPr>
-          <a:lstStyle/>
-          <a:p>
-            <a:pPr algn="ctr">
-              <a:lnSpc>
-                <a:spcPct val="90000"/>
-              </a:lnSpc>
-            </a:pPr>
-            <a:r>
-              <a:rPr sz="5200" b="1">
-                <a:solidFill>
-                  <a:srgbClr val="14181F"/>
-                </a:solidFill>
-                <a:latin typeface="Bricolage Grotesque"/>
-              </a:rPr>
-              <a:t>$500</a:t>
-            </a:r>
-          </a:p>
-        </p:txBody>
-      </p:sp>
-      <p:sp>
-        <p:nvSpPr>
-          <p:cNvPr id="5" name="TextBox 4"/>
-          <p:cNvSpPr txBox="1"/>
-          <p:nvPr/>
-        </p:nvSpPr>
-        <p:spPr>
-          <a:xfrm>
-            <a:off x="777240" y="4937760"/>
-            <a:ext cx="6675120" cy="457200"/>
+            <a:off x="777240" y="3043936"/>
+            <a:ext cx="6675120" cy="3467608"/>
           </a:xfrm>
           <a:prstGeom prst="rect">
             <a:avLst/>
@@ -3681,66 +3942,27 @@
               </a:lnSpc>
             </a:pPr>
             <a:r>
-              <a:rPr sz="1800" b="1">
-                <a:solidFill>
-                  <a:srgbClr val="F5C13F"/>
-                </a:solidFill>
-                <a:latin typeface="Hanken Grotesk"/>
-              </a:rPr>
-              <a:t>DESDE</a:t>
-            </a:r>
-          </a:p>
-        </p:txBody>
-      </p:sp>
-      <p:sp>
-        <p:nvSpPr>
-          <p:cNvPr id="6" name="TextBox 5"/>
-          <p:cNvSpPr txBox="1"/>
-          <p:nvPr/>
-        </p:nvSpPr>
-        <p:spPr>
-          <a:xfrm>
-            <a:off x="777240" y="5577840"/>
-            <a:ext cx="6675120" cy="3086607"/>
-          </a:xfrm>
-          <a:prstGeom prst="rect">
-            <a:avLst/>
-          </a:prstGeom>
-          <a:noFill/>
-        </p:spPr>
-        <p:txBody>
-          <a:bodyPr wrap="square" anchor="t" lIns="0" rIns="0" tIns="0" bIns="0">
-            <a:spAutoFit/>
-          </a:bodyPr>
-          <a:lstStyle/>
-          <a:p>
-            <a:pPr algn="l">
-              <a:lnSpc>
-                <a:spcPct val="100000"/>
-              </a:lnSpc>
-            </a:pPr>
-            <a:r>
-              <a:rPr sz="4400" b="1">
+              <a:rPr sz="4000" b="1">
                 <a:solidFill>
                   <a:srgbClr val="FFFFFF"/>
                 </a:solidFill>
                 <a:latin typeface="Bricolage Grotesque"/>
               </a:rPr>
-              <a:t>Aporta desde $500, o el monto que quieras.</a:t>
-            </a:r>
-          </a:p>
-        </p:txBody>
-      </p:sp>
-      <p:sp>
-        <p:nvSpPr>
-          <p:cNvPr id="7" name="TextBox 6"/>
+              <a:t>Cada semana elegimos a quién ayudar: familia, junta de vecinos u ONG.</a:t>
+            </a:r>
+          </a:p>
+        </p:txBody>
+      </p:sp>
+      <p:sp>
+        <p:nvSpPr>
+          <p:cNvPr id="5" name="TextBox 4"/>
           <p:cNvSpPr txBox="1"/>
           <p:nvPr/>
         </p:nvSpPr>
         <p:spPr>
           <a:xfrm>
-            <a:off x="777240" y="8664447"/>
-            <a:ext cx="6675120" cy="1280160"/>
+            <a:off x="777240" y="6511544"/>
+            <a:ext cx="6675120" cy="1118108"/>
           </a:xfrm>
           <a:prstGeom prst="rect">
             <a:avLst/>
@@ -3759,113 +3981,9 @@
               </a:lnSpc>
             </a:pPr>
             <a:r>
-              <a:rPr sz="2400" b="0">
+              <a:rPr sz="2600" b="0">
                 <a:solidFill>
                   <a:srgbClr val="FFFFFF"/>
-                </a:solidFill>
-                <a:latin typeface="Hanken Grotesk"/>
-              </a:rPr>
-              <a:t>También puedes donar de forma anónima.</a:t>
-            </a:r>
-          </a:p>
-        </p:txBody>
-      </p:sp>
-    </p:spTree>
-  </p:cSld>
-  <p:clrMapOvr>
-    <a:masterClrMapping/>
-  </p:clrMapOvr>
-</p:sld>
-</file>
-
-<file path=ppt/slides/slide4.xml><?xml version="1.0" encoding="utf-8"?>
-<p:sld xmlns:a="http://schemas.openxmlformats.org/drawingml/2006/main" xmlns:p="http://schemas.openxmlformats.org/presentationml/2006/main" xmlns:r="http://schemas.openxmlformats.org/officeDocument/2006/relationships">
-  <p:cSld>
-    <p:bg>
-      <p:bgPr>
-        <a:solidFill>
-          <a:srgbClr val="FFFFFF"/>
-        </a:solidFill>
-        <a:effectLst/>
-      </p:bgPr>
-    </p:bg>
-    <p:spTree>
-      <p:nvGrpSpPr>
-        <p:cNvPr id="1" name=""/>
-        <p:cNvGrpSpPr/>
-        <p:nvPr/>
-      </p:nvGrpSpPr>
-      <p:grpSpPr/>
-      <p:sp>
-        <p:nvSpPr>
-          <p:cNvPr id="2" name="TextBox 1"/>
-          <p:cNvSpPr txBox="1"/>
-          <p:nvPr/>
-        </p:nvSpPr>
-        <p:spPr>
-          <a:xfrm>
-            <a:off x="777240" y="2771267"/>
-            <a:ext cx="6675120" cy="3626358"/>
-          </a:xfrm>
-          <a:prstGeom prst="rect">
-            <a:avLst/>
-          </a:prstGeom>
-          <a:noFill/>
-        </p:spPr>
-        <p:txBody>
-          <a:bodyPr wrap="square" anchor="t" lIns="0" rIns="0" tIns="0" bIns="0">
-            <a:spAutoFit/>
-          </a:bodyPr>
-          <a:lstStyle/>
-          <a:p>
-            <a:pPr algn="ctr">
-              <a:lnSpc>
-                <a:spcPct val="100000"/>
-              </a:lnSpc>
-            </a:pPr>
-            <a:r>
-              <a:rPr sz="4200" b="1">
-                <a:solidFill>
-                  <a:srgbClr val="14181F"/>
-                </a:solidFill>
-                <a:latin typeface="Bricolage Grotesque"/>
-              </a:rPr>
-              <a:t>Cada semana elegimos a quién ayudar: una familia, junta de vecinos u ONG.</a:t>
-            </a:r>
-          </a:p>
-        </p:txBody>
-      </p:sp>
-      <p:sp>
-        <p:nvSpPr>
-          <p:cNvPr id="3" name="TextBox 2"/>
-          <p:cNvSpPr txBox="1"/>
-          <p:nvPr/>
-        </p:nvSpPr>
-        <p:spPr>
-          <a:xfrm>
-            <a:off x="777240" y="6397625"/>
-            <a:ext cx="6675120" cy="1118108"/>
-          </a:xfrm>
-          <a:prstGeom prst="rect">
-            <a:avLst/>
-          </a:prstGeom>
-          <a:noFill/>
-        </p:spPr>
-        <p:txBody>
-          <a:bodyPr wrap="square" anchor="t" lIns="0" rIns="0" tIns="0" bIns="0">
-            <a:spAutoFit/>
-          </a:bodyPr>
-          <a:lstStyle/>
-          <a:p>
-            <a:pPr algn="ctr">
-              <a:lnSpc>
-                <a:spcPct val="110000"/>
-              </a:lnSpc>
-            </a:pPr>
-            <a:r>
-              <a:rPr sz="2600" b="0">
-                <a:solidFill>
-                  <a:srgbClr val="14181F"/>
                 </a:solidFill>
                 <a:latin typeface="Hanken Grotesk"/>
               </a:rPr>
@@ -3902,22 +4020,22 @@
       <p:grpSpPr/>
       <p:sp>
         <p:nvSpPr>
-          <p:cNvPr id="2" name="Oval 1"/>
+          <p:cNvPr id="2" name="Rounded Rectangle 1"/>
           <p:cNvSpPr/>
           <p:nvPr/>
         </p:nvSpPr>
         <p:spPr>
           <a:xfrm>
-            <a:off x="-3036722" y="-2936847"/>
-            <a:ext cx="6748272" cy="8637788"/>
-          </a:xfrm>
-          <a:prstGeom prst="ellipse">
-            <a:avLst/>
+            <a:off x="777240" y="777240"/>
+            <a:ext cx="1138428" cy="373380"/>
+          </a:xfrm>
+          <a:prstGeom prst="roundRect">
+            <a:avLst>
+              <a:gd name="adj" fmla="val 50000"/>
+            </a:avLst>
           </a:prstGeom>
           <a:solidFill>
-            <a:srgbClr val="14181F">
-              <a:alpha val="16000"/>
-            </a:srgbClr>
+            <a:srgbClr val="14181F"/>
           </a:solidFill>
           <a:ln>
             <a:noFill/>
@@ -3939,10 +4057,19 @@
           </a:fontRef>
         </p:style>
         <p:txBody>
-          <a:bodyPr rtlCol="0" anchor="ctr"/>
+          <a:bodyPr rtlCol="0" anchor="ctr" wrap="none" lIns="128016" rIns="128016" tIns="18288" bIns="18288"/>
           <a:lstStyle/>
           <a:p>
             <a:pPr algn="ctr"/>
+            <a:r>
+              <a:rPr sz="1500" b="1">
+                <a:solidFill>
+                  <a:srgbClr val="F5C13F"/>
+                </a:solidFill>
+                <a:latin typeface="Bricolage Grotesque"/>
+              </a:rPr>
+              <a:t>CONOCE</a:t>
+            </a:r>
           </a:p>
         </p:txBody>
       </p:sp>
@@ -3954,7 +4081,7 @@
         </p:nvSpPr>
         <p:spPr>
           <a:xfrm>
-            <a:off x="777240" y="2697861"/>
+            <a:off x="777240" y="2983611"/>
             <a:ext cx="1371600" cy="146304"/>
           </a:xfrm>
           <a:prstGeom prst="rect">
@@ -3998,8 +4125,8 @@
         </p:nvSpPr>
         <p:spPr>
           <a:xfrm>
-            <a:off x="777240" y="3155061"/>
-            <a:ext cx="6675120" cy="3245357"/>
+            <a:off x="777240" y="3440811"/>
+            <a:ext cx="6675120" cy="2673857"/>
           </a:xfrm>
           <a:prstGeom prst="rect">
             <a:avLst/>
@@ -4018,7 +4145,7 @@
               </a:lnSpc>
             </a:pPr>
             <a:r>
-              <a:rPr sz="6200" b="1">
+              <a:rPr sz="5000" b="1">
                 <a:solidFill>
                   <a:srgbClr val="14181F"/>
                 </a:solidFill>
@@ -4037,8 +4164,8 @@
         </p:nvSpPr>
         <p:spPr>
           <a:xfrm>
-            <a:off x="777240" y="6400418"/>
-            <a:ext cx="6675120" cy="1118108"/>
+            <a:off x="777240" y="8412481"/>
+            <a:ext cx="6675120" cy="822960"/>
           </a:xfrm>
           <a:prstGeom prst="rect">
             <a:avLst/>
@@ -4053,15 +4180,15 @@
           <a:p>
             <a:pPr algn="l">
               <a:lnSpc>
-                <a:spcPct val="110000"/>
+                <a:spcPct val="100000"/>
               </a:lnSpc>
             </a:pPr>
             <a:r>
-              <a:rPr sz="2600" b="0">
+              <a:rPr sz="2600" b="1">
                 <a:solidFill>
                   <a:srgbClr val="14181F"/>
                 </a:solidFill>
-                <a:latin typeface="Hanken Grotesk"/>
+                <a:latin typeface="Bricolage Grotesque"/>
               </a:rPr>
               <a:t>huevera.cl/donaciones</a:t>
             </a:r>
